--- a/slides/Chapter 13 - The Criminal Justice System (Lecture Deck).pptx
+++ b/slides/Chapter 13 - The Criminal Justice System (Lecture Deck).pptx
@@ -9038,92 +9038,6 @@
           </a:p>
         </p:txBody>
       </p:sp>
-      <p:sp>
-        <p:nvSpPr>
-          <p:cNvPr id="30" name="Shape 27"/>
-          <p:cNvSpPr/>
-          <p:nvPr/>
-        </p:nvSpPr>
-        <p:spPr>
-          <a:xfrm>
-            <a:off x="594360" y="6080760"/>
-            <a:ext cx="11002975" cy="365760"/>
-          </a:xfrm>
-          <a:prstGeom prst="roundRect">
-            <a:avLst>
-              <a:gd name="adj" fmla="val 17500"/>
-            </a:avLst>
-          </a:prstGeom>
-          <a:solidFill>
-            <a:srgbClr val="FFFFFF"/>
-          </a:solidFill>
-          <a:ln w="19050">
-            <a:solidFill>
-              <a:srgbClr val="B07D2B"/>
-            </a:solidFill>
-            <a:prstDash val="solid"/>
-          </a:ln>
-        </p:spPr>
-      </p:sp>
-      <p:sp>
-        <p:nvSpPr>
-          <p:cNvPr id="31" name="Text 28"/>
-          <p:cNvSpPr txBox="1"/>
-          <p:nvPr/>
-        </p:nvSpPr>
-        <p:spPr>
-          <a:xfrm>
-            <a:off x="868680" y="6245352"/>
-            <a:ext cx="10454335" cy="329184"/>
-          </a:xfrm>
-          <a:prstGeom prst="rect">
-            <a:avLst/>
-          </a:prstGeom>
-          <a:noFill/>
-          <a:ln/>
-        </p:spPr>
-        <p:txBody>
-          <a:bodyPr wrap="square" lIns="0" tIns="0" rIns="0" bIns="0" rtlCol="0" anchor="ctr"/>
-          <a:lstStyle/>
-          <a:p>
-            <a:pPr indent="0" marL="0">
-              <a:buNone/>
-            </a:pPr>
-            <a:endParaRPr lang="en-US" sz="1400" dirty="0"/>
-          </a:p>
-        </p:txBody>
-      </p:sp>
-      <p:sp>
-        <p:nvSpPr>
-          <p:cNvPr id="32" name="Text 29"/>
-          <p:cNvSpPr txBox="1"/>
-          <p:nvPr/>
-        </p:nvSpPr>
-        <p:spPr>
-          <a:xfrm>
-            <a:off x="868680" y="6611112"/>
-            <a:ext cx="10454335" cy="-347472"/>
-          </a:xfrm>
-          <a:prstGeom prst="rect">
-            <a:avLst/>
-          </a:prstGeom>
-          <a:noFill/>
-          <a:ln/>
-        </p:spPr>
-        <p:txBody>
-          <a:bodyPr wrap="square" lIns="0" tIns="0" rIns="0" bIns="0" rtlCol="0" anchor="ctr"/>
-          <a:lstStyle/>
-          <a:p>
-            <a:pPr indent="0" marL="0">
-              <a:lnSpc>
-                <a:spcPts val="1700"/>
-              </a:lnSpc>
-              <a:buNone/>
-            </a:pPr>
-            <a:endParaRPr lang="en-US" sz="1250" dirty="0"/>
-          </a:p>
-        </p:txBody>
-      </p:sp>
     </p:spTree>
   </p:cSld>
   <p:clrMapOvr>
@@ -11853,92 +11767,6 @@
               <a:t>Felony charges in Texas generally proceed by indictment. Notably, the federal grand jury requirement is one of the few provisions never incorporated against the states.</a:t>
             </a:r>
             <a:endParaRPr lang="en-US" sz="1200" dirty="0"/>
-          </a:p>
-        </p:txBody>
-      </p:sp>
-      <p:sp>
-        <p:nvSpPr>
-          <p:cNvPr id="16" name="Shape 13"/>
-          <p:cNvSpPr/>
-          <p:nvPr/>
-        </p:nvSpPr>
-        <p:spPr>
-          <a:xfrm>
-            <a:off x="594360" y="5897880"/>
-            <a:ext cx="11002975" cy="548640"/>
-          </a:xfrm>
-          <a:prstGeom prst="roundRect">
-            <a:avLst>
-              <a:gd name="adj" fmla="val 11667"/>
-            </a:avLst>
-          </a:prstGeom>
-          <a:solidFill>
-            <a:srgbClr val="FFFFFF"/>
-          </a:solidFill>
-          <a:ln w="19050">
-            <a:solidFill>
-              <a:srgbClr val="B07D2B"/>
-            </a:solidFill>
-            <a:prstDash val="solid"/>
-          </a:ln>
-        </p:spPr>
-      </p:sp>
-      <p:sp>
-        <p:nvSpPr>
-          <p:cNvPr id="17" name="Text 14"/>
-          <p:cNvSpPr txBox="1"/>
-          <p:nvPr/>
-        </p:nvSpPr>
-        <p:spPr>
-          <a:xfrm>
-            <a:off x="868680" y="6062472"/>
-            <a:ext cx="10454335" cy="329184"/>
-          </a:xfrm>
-          <a:prstGeom prst="rect">
-            <a:avLst/>
-          </a:prstGeom>
-          <a:noFill/>
-          <a:ln/>
-        </p:spPr>
-        <p:txBody>
-          <a:bodyPr wrap="square" lIns="0" tIns="0" rIns="0" bIns="0" rtlCol="0" anchor="ctr"/>
-          <a:lstStyle/>
-          <a:p>
-            <a:pPr indent="0" marL="0">
-              <a:buNone/>
-            </a:pPr>
-            <a:endParaRPr lang="en-US" sz="1400" dirty="0"/>
-          </a:p>
-        </p:txBody>
-      </p:sp>
-      <p:sp>
-        <p:nvSpPr>
-          <p:cNvPr id="18" name="Text 15"/>
-          <p:cNvSpPr txBox="1"/>
-          <p:nvPr/>
-        </p:nvSpPr>
-        <p:spPr>
-          <a:xfrm>
-            <a:off x="868680" y="6428232"/>
-            <a:ext cx="10454335" cy="-164592"/>
-          </a:xfrm>
-          <a:prstGeom prst="rect">
-            <a:avLst/>
-          </a:prstGeom>
-          <a:noFill/>
-          <a:ln/>
-        </p:spPr>
-        <p:txBody>
-          <a:bodyPr wrap="square" lIns="0" tIns="0" rIns="0" bIns="0" rtlCol="0" anchor="ctr"/>
-          <a:lstStyle/>
-          <a:p>
-            <a:pPr indent="0" marL="0">
-              <a:lnSpc>
-                <a:spcPts val="1700"/>
-              </a:lnSpc>
-              <a:buNone/>
-            </a:pPr>
-            <a:endParaRPr lang="en-US" sz="1250" dirty="0"/>
           </a:p>
         </p:txBody>
       </p:sp>

--- a/slides/Chapter 13 - The Criminal Justice System (Lecture Deck).pptx
+++ b/slides/Chapter 13 - The Criminal Justice System (Lecture Deck).pptx
@@ -715,8 +715,8 @@
             <a:r>
               <a:rPr lang="en-US" dirty="0"/>
               <a:t>TIMING: 8 minutes. Handle carefully and state both cases fairly.
-THE JUXTAPOSITION IS THE LESSON: Texas leads the nation in executions and also in
-exonerations. Both are documented. Put them side by side and let students sit with
+THE JUXTAPOSITION IS THE LESSON: Texas leads the nation in executions and ranks
+second in exonerations (behind Illinois). Both are documented. Put them side by side and let students sit with
 it rather than resolving it for them.
 FUTURE DANGEROUSNESS is the element that distinguishes Texas capital sentencing.
 The jury must predict whether the defendant would pose a continuing threat. Ask
@@ -3740,7 +3740,7 @@
                 <a:ea typeface="Calibri" pitchFamily="34" charset="-122"/>
                 <a:cs typeface="Calibri" pitchFamily="34" charset="-120"/>
               </a:rPr>
-              <a:t>Texas also leads in exonerations. The Timothy Cole Act compensates the wrongfully convicted, and DNA testing has overturned convictions.</a:t>
+              <a:t>Texas ranks second only to Illinois in exonerations (more than 400 since 1989, per the National Registry of Exonerations). The Timothy Cole Act compensates the wrongfully convicted, and DNA testing has overturned convictions.</a:t>
             </a:r>
             <a:endParaRPr lang="en-US" sz="1200" dirty="0"/>
           </a:p>
@@ -4221,7 +4221,7 @@
                 <a:ea typeface="Calibri" pitchFamily="34" charset="-122"/>
                 <a:cs typeface="Calibri" pitchFamily="34" charset="-120"/>
               </a:rPr>
-              <a:t>The Texas Department of Criminal Justice runs state prisons, state jails, parole supervision, and community supervision, under a nine-member board appointed by the governor.</a:t>
+              <a:t>The Texas Department of Criminal Justice runs state prisons, state jails, and parole supervision, and funds and sets standards for local community supervision (probation) departments, under a nine-member board appointed by the governor.</a:t>
             </a:r>
             <a:endParaRPr lang="en-US" sz="1200" dirty="0"/>
           </a:p>
@@ -4792,7 +4792,7 @@
                 <a:ea typeface="Calibri" pitchFamily="34" charset="-122"/>
                 <a:cs typeface="Calibri" pitchFamily="34" charset="-120"/>
               </a:rPr>
-              <a:t>Texas leads the nation in executions and in exonerations. How should a state weigh the possibility of irreversible error against the case for capital punishment?</a:t>
+              <a:t>Texas leads the nation in executions and is second in exonerations. How should a state weigh the possibility of irreversible error against the case for capital punishment?</a:t>
             </a:r>
             <a:endParaRPr lang="en-US" sz="1600" dirty="0"/>
           </a:p>
@@ -5352,7 +5352,7 @@
                 <a:ea typeface="Calibri" pitchFamily="34" charset="-122"/>
                 <a:cs typeface="Calibri" pitchFamily="34" charset="-120"/>
               </a:rPr>
-              <a:t>Chapter 13 in the Trailblazer Trek: 8 sections, 1,760 points, one of the longest in the course.</a:t>
+              <a:t>Chapter 13 in the Trailblazer Trek: 9 sections, 1,760 points, one of the longest in the course.</a:t>
             </a:r>
             <a:endParaRPr lang="en-US" sz="1200" dirty="0"/>
           </a:p>
@@ -7358,7 +7358,7 @@
                 <a:ea typeface="Calibri" pitchFamily="34" charset="-122"/>
                 <a:cs typeface="Calibri" pitchFamily="34" charset="-120"/>
               </a:rPr>
-              <a:t>Slide order follows Chapter 13's eight sections. Assessment items are in TEST-BANK.md Part A.</a:t>
+              <a:t>Slide order follows Chapter 13's nine sections. Assessment items are in TEST-BANK.md Part A.</a:t>
             </a:r>
             <a:endParaRPr lang="en-US" sz="1250" dirty="0"/>
           </a:p>
